--- a/docs/Raised Expectations.pptx
+++ b/docs/Raised Expectations.pptx
@@ -3159,8 +3159,8 @@
         </p:nvSpPr>
         <p:spPr>
           <a:xfrm>
-            <a:off x="3480105" y="4755518"/>
-            <a:ext cx="4222454" cy="0"/>
+            <a:off x="3619973" y="4755518"/>
+            <a:ext cx="4142529" cy="0"/>
           </a:xfrm>
           <a:prstGeom prst="line">
             <a:avLst/>
@@ -3275,13 +3275,65 @@
       </p:sp>
       <p:sp>
         <p:nvSpPr>
-          <p:cNvPr name="TextBox 6" id="6"/>
+          <p:cNvPr name="Freeform 6" id="6"/>
+          <p:cNvSpPr/>
+          <p:nvPr/>
+        </p:nvSpPr>
+        <p:spPr>
+          <a:xfrm flipH="false" flipV="false" rot="0">
+            <a:off x="11552928" y="8181704"/>
+            <a:ext cx="699089" cy="666041"/>
+          </a:xfrm>
+          <a:custGeom>
+            <a:avLst/>
+            <a:gdLst/>
+            <a:ahLst/>
+            <a:cxnLst/>
+            <a:rect r="r" b="b" t="t" l="l"/>
+            <a:pathLst>
+              <a:path h="666041" w="699089">
+                <a:moveTo>
+                  <a:pt x="0" y="0"/>
+                </a:moveTo>
+                <a:lnTo>
+                  <a:pt x="699089" y="0"/>
+                </a:lnTo>
+                <a:lnTo>
+                  <a:pt x="699089" y="666042"/>
+                </a:lnTo>
+                <a:lnTo>
+                  <a:pt x="0" y="666042"/>
+                </a:lnTo>
+                <a:lnTo>
+                  <a:pt x="0" y="0"/>
+                </a:lnTo>
+                <a:close/>
+              </a:path>
+            </a:pathLst>
+          </a:custGeom>
+          <a:blipFill>
+            <a:blip r:embed="rId5">
+              <a:extLst>
+                <a:ext uri="{96DAC541-7B7A-43D3-8B79-37D633B846F1}">
+                  <asvg:svgBlip xmlns:asvg="http://schemas.microsoft.com/office/drawing/2016/SVG/main" r:embed="rId6"/>
+                </a:ext>
+              </a:extLst>
+            </a:blip>
+            <a:stretch>
+              <a:fillRect l="0" t="0" r="0" b="0"/>
+            </a:stretch>
+          </a:blipFill>
+        </p:spPr>
+      </p:sp>
+      <p:sp>
+        <p:nvSpPr>
+          <p:cNvPr name="TextBox 7" id="7"/>
           <p:cNvSpPr txBox="true"/>
           <p:nvPr/>
         </p:nvSpPr>
         <p:spPr>
           <a:xfrm rot="0">
-            <a:off x="1083210" y="4781547"/>
+            <a:off x="401165" y="4917089"/>
             <a:ext cx="7361337" cy="1566544"/>
           </a:xfrm>
           <a:prstGeom prst="rect">
@@ -3316,7 +3368,7 @@
       </p:sp>
       <p:sp>
         <p:nvSpPr>
-          <p:cNvPr name="TextBox 7" id="7"/>
+          <p:cNvPr name="TextBox 8" id="8"/>
           <p:cNvSpPr txBox="true"/>
           <p:nvPr/>
         </p:nvSpPr>
@@ -3855,7 +3907,7 @@
                 <a:cs typeface="Readex Pro Semi-Bold"/>
                 <a:sym typeface="Readex Pro Semi-Bold"/>
               </a:rPr>
-              <a:t>CROSS-RECURRENCE QUANTIFICATION ANALAYSIS</a:t>
+              <a:t>CROSS-RECURRENCE QUANTIFICATION ANALYSIS</a:t>
             </a:r>
           </a:p>
         </p:txBody>
@@ -5028,8 +5080,8 @@
         </p:nvSpPr>
         <p:spPr>
           <a:xfrm rot="0">
-            <a:off x="2969204" y="4290486"/>
-            <a:ext cx="12349593" cy="4365625"/>
+            <a:off x="2969204" y="3688298"/>
+            <a:ext cx="12349593" cy="5680075"/>
           </a:xfrm>
           <a:prstGeom prst="rect">
             <a:avLst/>
@@ -5088,6 +5140,32 @@
             </a:pPr>
           </a:p>
           <a:p>
+            <a:pPr algn="l">
+              <a:lnSpc>
+                <a:spcPts val="3499"/>
+              </a:lnSpc>
+            </a:pPr>
+            <a:r>
+              <a:rPr lang="en-US" sz="2499">
+                <a:solidFill>
+                  <a:srgbClr val="002B58"/>
+                </a:solidFill>
+                <a:latin typeface="DM Sans"/>
+                <a:ea typeface="DM Sans"/>
+                <a:cs typeface="DM Sans"/>
+                <a:sym typeface="DM Sans"/>
+              </a:rPr>
+              <a:t>Languages play a large role in pitch production, so can expect a cross-linguistic difference in relationship between eyebrow movement and pitch</a:t>
+            </a:r>
+          </a:p>
+          <a:p>
+            <a:pPr algn="l">
+              <a:lnSpc>
+                <a:spcPts val="3499"/>
+              </a:lnSpc>
+            </a:pPr>
+          </a:p>
+          <a:p>
             <a:pPr algn="just">
               <a:lnSpc>
                 <a:spcPts val="3499"/>
@@ -5168,7 +5246,7 @@
         </p:nvSpPr>
         <p:spPr>
           <a:xfrm rot="0">
-            <a:off x="3690340" y="1488014"/>
+            <a:off x="3690340" y="885825"/>
             <a:ext cx="10907320" cy="2441575"/>
           </a:xfrm>
           <a:prstGeom prst="rect">
@@ -6169,6 +6247,145 @@
                 <a:sym typeface="Readex Pro Semi-Bold"/>
               </a:rPr>
               <a:t>YOU</a:t>
+            </a:r>
+          </a:p>
+        </p:txBody>
+      </p:sp>
+      <p:sp>
+        <p:nvSpPr>
+          <p:cNvPr name="Freeform 7" id="7"/>
+          <p:cNvSpPr/>
+          <p:nvPr/>
+        </p:nvSpPr>
+        <p:spPr>
+          <a:xfrm flipH="false" flipV="false" rot="0">
+            <a:off x="12675437" y="7119004"/>
+            <a:ext cx="2563230" cy="2563230"/>
+          </a:xfrm>
+          <a:custGeom>
+            <a:avLst/>
+            <a:gdLst/>
+            <a:ahLst/>
+            <a:cxnLst/>
+            <a:rect r="r" b="b" t="t" l="l"/>
+            <a:pathLst>
+              <a:path h="2563230" w="2563230">
+                <a:moveTo>
+                  <a:pt x="0" y="0"/>
+                </a:moveTo>
+                <a:lnTo>
+                  <a:pt x="2563230" y="0"/>
+                </a:lnTo>
+                <a:lnTo>
+                  <a:pt x="2563230" y="2563231"/>
+                </a:lnTo>
+                <a:lnTo>
+                  <a:pt x="0" y="2563231"/>
+                </a:lnTo>
+                <a:lnTo>
+                  <a:pt x="0" y="0"/>
+                </a:lnTo>
+                <a:close/>
+              </a:path>
+            </a:pathLst>
+          </a:custGeom>
+          <a:blipFill>
+            <a:blip r:embed="rId6"/>
+            <a:stretch>
+              <a:fillRect l="0" t="0" r="0" b="0"/>
+            </a:stretch>
+          </a:blipFill>
+        </p:spPr>
+      </p:sp>
+      <p:sp>
+        <p:nvSpPr>
+          <p:cNvPr name="Freeform 8" id="8"/>
+          <p:cNvSpPr/>
+          <p:nvPr/>
+        </p:nvSpPr>
+        <p:spPr>
+          <a:xfrm flipH="true" flipV="false" rot="-6103867">
+            <a:off x="10880901" y="6545496"/>
+            <a:ext cx="1377691" cy="2456667"/>
+          </a:xfrm>
+          <a:custGeom>
+            <a:avLst/>
+            <a:gdLst/>
+            <a:ahLst/>
+            <a:cxnLst/>
+            <a:rect r="r" b="b" t="t" l="l"/>
+            <a:pathLst>
+              <a:path h="2456667" w="1377691">
+                <a:moveTo>
+                  <a:pt x="1377691" y="0"/>
+                </a:moveTo>
+                <a:lnTo>
+                  <a:pt x="0" y="0"/>
+                </a:lnTo>
+                <a:lnTo>
+                  <a:pt x="0" y="2456667"/>
+                </a:lnTo>
+                <a:lnTo>
+                  <a:pt x="1377691" y="2456667"/>
+                </a:lnTo>
+                <a:lnTo>
+                  <a:pt x="1377691" y="0"/>
+                </a:lnTo>
+                <a:close/>
+              </a:path>
+            </a:pathLst>
+          </a:custGeom>
+          <a:blipFill>
+            <a:blip r:embed="rId7">
+              <a:extLst>
+                <a:ext uri="{96DAC541-7B7A-43D3-8B79-37D633B846F1}">
+                  <asvg:svgBlip xmlns:asvg="http://schemas.microsoft.com/office/drawing/2016/SVG/main" r:embed="rId8"/>
+                </a:ext>
+              </a:extLst>
+            </a:blip>
+            <a:stretch>
+              <a:fillRect l="0" t="0" r="0" b="0"/>
+            </a:stretch>
+          </a:blipFill>
+        </p:spPr>
+      </p:sp>
+      <p:sp>
+        <p:nvSpPr>
+          <p:cNvPr name="TextBox 9" id="9"/>
+          <p:cNvSpPr txBox="true"/>
+          <p:nvPr/>
+        </p:nvSpPr>
+        <p:spPr>
+          <a:xfrm rot="0">
+            <a:off x="8628899" y="8650405"/>
+            <a:ext cx="3006550" cy="406706"/>
+          </a:xfrm>
+          <a:prstGeom prst="rect">
+            <a:avLst/>
+          </a:prstGeom>
+        </p:spPr>
+        <p:txBody>
+          <a:bodyPr anchor="t" rtlCol="false" tIns="0" lIns="0" bIns="0" rIns="0">
+            <a:spAutoFit/>
+          </a:bodyPr>
+          <a:lstStyle/>
+          <a:p>
+            <a:pPr algn="ctr">
+              <a:lnSpc>
+                <a:spcPts val="3327"/>
+              </a:lnSpc>
+            </a:pPr>
+            <a:r>
+              <a:rPr lang="en-US" sz="2376">
+                <a:solidFill>
+                  <a:srgbClr val="000000"/>
+                </a:solidFill>
+                <a:latin typeface="DM Sans"/>
+                <a:ea typeface="DM Sans"/>
+                <a:cs typeface="DM Sans"/>
+                <a:sym typeface="DM Sans"/>
+              </a:rPr>
+              <a:t>our repository (again)</a:t>
             </a:r>
           </a:p>
         </p:txBody>
@@ -8507,7 +8724,7 @@
         <p:spPr>
           <a:xfrm rot="0">
             <a:off x="3468213" y="3734145"/>
-            <a:ext cx="11850583" cy="5434991"/>
+            <a:ext cx="11850583" cy="5854091"/>
           </a:xfrm>
           <a:prstGeom prst="rect">
             <a:avLst/>
@@ -8598,7 +8815,7 @@
                 <a:cs typeface="DM Sans"/>
                 <a:sym typeface="DM Sans"/>
               </a:rPr>
-              <a:t> - OpenFace data extracted from video data. Took the X and Y coordinates for the eyebrows (points 17-26) and the tip of the nose (point 33). </a:t>
+              <a:t> - OpenFace data extracted from video data. Took the X and Y coordinates for the eyebrows (points 17-26) and the tip of the nose (point 33). Relative positions of points 17-26 as well as y-axis displacement of eyebrow centre of mass from tip of nose. </a:t>
             </a:r>
             <a:r>
               <a:rPr lang="en-US" sz="2398" i="true">
@@ -9497,7 +9714,7 @@
                 <a:cs typeface="DM Sans"/>
                 <a:sym typeface="DM Sans"/>
               </a:rPr>
-              <a:t>Hypothesis 2: Cross-Recurrence Quantification Analysis with phase-space reconstruction to analyse coupling between eyebrow movement and pitch dynamics on an intrapersonal level.</a:t>
+              <a:t>Hypothesis 2: Cross-Recurrence Quantification Analysis with phase-space reconstruction to analyse coupling between eyebrow movement and pitch dynamics on an intrapersonal level</a:t>
             </a:r>
           </a:p>
           <a:p>
@@ -9858,8 +10075,8 @@
         </p:nvSpPr>
         <p:spPr>
           <a:xfrm flipH="false" flipV="false" rot="0">
-            <a:off x="2030997" y="2599180"/>
-            <a:ext cx="7087394" cy="6474669"/>
+            <a:off x="4284095" y="1742929"/>
+            <a:ext cx="9719811" cy="3887924"/>
           </a:xfrm>
           <a:custGeom>
             <a:avLst/>
@@ -9868,18 +10085,18 @@
             <a:cxnLst/>
             <a:rect r="r" b="b" t="t" l="l"/>
             <a:pathLst>
-              <a:path h="6474669" w="7087394">
+              <a:path h="3887924" w="9719811">
                 <a:moveTo>
                   <a:pt x="0" y="0"/>
                 </a:moveTo>
                 <a:lnTo>
-                  <a:pt x="7087394" y="0"/>
-                </a:lnTo>
-                <a:lnTo>
-                  <a:pt x="7087394" y="6474669"/>
-                </a:lnTo>
-                <a:lnTo>
-                  <a:pt x="0" y="6474669"/>
+                  <a:pt x="9719810" y="0"/>
+                </a:lnTo>
+                <a:lnTo>
+                  <a:pt x="9719810" y="3887924"/>
+                </a:lnTo>
+                <a:lnTo>
+                  <a:pt x="0" y="3887924"/>
                 </a:lnTo>
                 <a:lnTo>
                   <a:pt x="0" y="0"/>
@@ -9904,8 +10121,8 @@
         </p:nvSpPr>
         <p:spPr>
           <a:xfrm flipH="false" flipV="false" rot="0">
-            <a:off x="9385091" y="2814710"/>
-            <a:ext cx="7193171" cy="5394878"/>
+            <a:off x="4284095" y="5926128"/>
+            <a:ext cx="9719811" cy="3887924"/>
           </a:xfrm>
           <a:custGeom>
             <a:avLst/>
@@ -9914,18 +10131,18 @@
             <a:cxnLst/>
             <a:rect r="r" b="b" t="t" l="l"/>
             <a:pathLst>
-              <a:path h="5394878" w="7193171">
+              <a:path h="3887924" w="9719811">
                 <a:moveTo>
                   <a:pt x="0" y="0"/>
                 </a:moveTo>
                 <a:lnTo>
-                  <a:pt x="7193171" y="0"/>
-                </a:lnTo>
-                <a:lnTo>
-                  <a:pt x="7193171" y="5394878"/>
-                </a:lnTo>
-                <a:lnTo>
-                  <a:pt x="0" y="5394878"/>
+                  <a:pt x="9719810" y="0"/>
+                </a:lnTo>
+                <a:lnTo>
+                  <a:pt x="9719810" y="3887924"/>
+                </a:lnTo>
+                <a:lnTo>
+                  <a:pt x="0" y="3887924"/>
                 </a:lnTo>
                 <a:lnTo>
                   <a:pt x="0" y="0"/>
@@ -9978,7 +10195,7 @@
                 <a:cs typeface="Readex Pro Semi-Bold"/>
                 <a:sym typeface="Readex Pro Semi-Bold"/>
               </a:rPr>
-              <a:t>TIME-DELAYED MUTUAL INFORMATION</a:t>
+              <a:t>WINDOWED MULTISCALE SYNCHRONY</a:t>
             </a:r>
           </a:p>
         </p:txBody>
@@ -10231,8 +10448,8 @@
         </p:nvSpPr>
         <p:spPr>
           <a:xfrm flipH="false" flipV="false" rot="0">
-            <a:off x="4284095" y="1742929"/>
-            <a:ext cx="9719811" cy="3887924"/>
+            <a:off x="2030997" y="2599180"/>
+            <a:ext cx="7087394" cy="6474669"/>
           </a:xfrm>
           <a:custGeom>
             <a:avLst/>
@@ -10241,18 +10458,18 @@
             <a:cxnLst/>
             <a:rect r="r" b="b" t="t" l="l"/>
             <a:pathLst>
-              <a:path h="3887924" w="9719811">
+              <a:path h="6474669" w="7087394">
                 <a:moveTo>
                   <a:pt x="0" y="0"/>
                 </a:moveTo>
                 <a:lnTo>
-                  <a:pt x="9719810" y="0"/>
-                </a:lnTo>
-                <a:lnTo>
-                  <a:pt x="9719810" y="3887924"/>
-                </a:lnTo>
-                <a:lnTo>
-                  <a:pt x="0" y="3887924"/>
+                  <a:pt x="7087394" y="0"/>
+                </a:lnTo>
+                <a:lnTo>
+                  <a:pt x="7087394" y="6474669"/>
+                </a:lnTo>
+                <a:lnTo>
+                  <a:pt x="0" y="6474669"/>
                 </a:lnTo>
                 <a:lnTo>
                   <a:pt x="0" y="0"/>
@@ -10277,8 +10494,8 @@
         </p:nvSpPr>
         <p:spPr>
           <a:xfrm flipH="false" flipV="false" rot="0">
-            <a:off x="4284095" y="5926128"/>
-            <a:ext cx="9719811" cy="3887924"/>
+            <a:off x="9524366" y="3191303"/>
+            <a:ext cx="7053897" cy="5290422"/>
           </a:xfrm>
           <a:custGeom>
             <a:avLst/>
@@ -10287,18 +10504,18 @@
             <a:cxnLst/>
             <a:rect r="r" b="b" t="t" l="l"/>
             <a:pathLst>
-              <a:path h="3887924" w="9719811">
+              <a:path h="5290422" w="7053897">
                 <a:moveTo>
                   <a:pt x="0" y="0"/>
                 </a:moveTo>
                 <a:lnTo>
-                  <a:pt x="9719810" y="0"/>
-                </a:lnTo>
-                <a:lnTo>
-                  <a:pt x="9719810" y="3887924"/>
-                </a:lnTo>
-                <a:lnTo>
-                  <a:pt x="0" y="3887924"/>
+                  <a:pt x="7053896" y="0"/>
+                </a:lnTo>
+                <a:lnTo>
+                  <a:pt x="7053896" y="5290423"/>
+                </a:lnTo>
+                <a:lnTo>
+                  <a:pt x="0" y="5290423"/>
                 </a:lnTo>
                 <a:lnTo>
                   <a:pt x="0" y="0"/>
@@ -10351,7 +10568,7 @@
                 <a:cs typeface="Readex Pro Semi-Bold"/>
                 <a:sym typeface="Readex Pro Semi-Bold"/>
               </a:rPr>
-              <a:t>WINDOWED MULTISCALE SYNCHRONY</a:t>
+              <a:t>TIME-DELAYED MUTUAL INFORMATION</a:t>
             </a:r>
           </a:p>
         </p:txBody>
